--- a/ch02_microbiome_data/figures/overview_zero_replacement.pptx
+++ b/ch02_microbiome_data/figures/overview_zero_replacement.pptx
@@ -371,7 +371,7 @@
           <a:p>
             <a:fld id="{C764DE79-268F-4C1A-8933-263129D2AF90}" type="datetimeFigureOut">
               <a:rPr lang="en-US" smtClean="0"/>
-              <a:t>6/16/2026</a:t>
+              <a:t>7/4/2026</a:t>
             </a:fld>
             <a:endParaRPr lang="en-US" dirty="0"/>
           </a:p>
@@ -542,7 +542,7 @@
           <a:p>
             <a:fld id="{C764DE79-268F-4C1A-8933-263129D2AF90}" type="datetimeFigureOut">
               <a:rPr lang="en-US" smtClean="0"/>
-              <a:t>6/16/2026</a:t>
+              <a:t>7/4/2026</a:t>
             </a:fld>
             <a:endParaRPr lang="en-US" dirty="0"/>
           </a:p>
@@ -723,7 +723,7 @@
           <a:p>
             <a:fld id="{C764DE79-268F-4C1A-8933-263129D2AF90}" type="datetimeFigureOut">
               <a:rPr lang="en-US" smtClean="0"/>
-              <a:t>6/16/2026</a:t>
+              <a:t>7/4/2026</a:t>
             </a:fld>
             <a:endParaRPr lang="en-US" dirty="0"/>
           </a:p>
@@ -929,7 +929,7 @@
           <a:p>
             <a:fld id="{C764DE79-268F-4C1A-8933-263129D2AF90}" type="datetimeFigureOut">
               <a:rPr lang="en-US" smtClean="0"/>
-              <a:t>6/16/2026</a:t>
+              <a:t>7/4/2026</a:t>
             </a:fld>
             <a:endParaRPr lang="en-US" dirty="0"/>
           </a:p>
@@ -1176,7 +1176,7 @@
           <a:p>
             <a:fld id="{C764DE79-268F-4C1A-8933-263129D2AF90}" type="datetimeFigureOut">
               <a:rPr lang="en-US" smtClean="0"/>
-              <a:t>6/16/2026</a:t>
+              <a:t>7/4/2026</a:t>
             </a:fld>
             <a:endParaRPr lang="en-US" dirty="0"/>
           </a:p>
@@ -1409,7 +1409,7 @@
           <a:p>
             <a:fld id="{C764DE79-268F-4C1A-8933-263129D2AF90}" type="datetimeFigureOut">
               <a:rPr lang="en-US" smtClean="0"/>
-              <a:t>6/16/2026</a:t>
+              <a:t>7/4/2026</a:t>
             </a:fld>
             <a:endParaRPr lang="en-US" dirty="0"/>
           </a:p>
@@ -1777,7 +1777,7 @@
           <a:p>
             <a:fld id="{C764DE79-268F-4C1A-8933-263129D2AF90}" type="datetimeFigureOut">
               <a:rPr lang="en-US" smtClean="0"/>
-              <a:t>6/16/2026</a:t>
+              <a:t>7/4/2026</a:t>
             </a:fld>
             <a:endParaRPr lang="en-US" dirty="0"/>
           </a:p>
@@ -1896,7 +1896,7 @@
           <a:p>
             <a:fld id="{C764DE79-268F-4C1A-8933-263129D2AF90}" type="datetimeFigureOut">
               <a:rPr lang="en-US" smtClean="0"/>
-              <a:t>6/16/2026</a:t>
+              <a:t>7/4/2026</a:t>
             </a:fld>
             <a:endParaRPr lang="en-US" dirty="0"/>
           </a:p>
@@ -1992,7 +1992,7 @@
           <a:p>
             <a:fld id="{C764DE79-268F-4C1A-8933-263129D2AF90}" type="datetimeFigureOut">
               <a:rPr lang="en-US" smtClean="0"/>
-              <a:t>6/16/2026</a:t>
+              <a:t>7/4/2026</a:t>
             </a:fld>
             <a:endParaRPr lang="en-US" dirty="0"/>
           </a:p>
@@ -2270,7 +2270,7 @@
           <a:p>
             <a:fld id="{C764DE79-268F-4C1A-8933-263129D2AF90}" type="datetimeFigureOut">
               <a:rPr lang="en-US" smtClean="0"/>
-              <a:t>6/16/2026</a:t>
+              <a:t>7/4/2026</a:t>
             </a:fld>
             <a:endParaRPr lang="en-US" dirty="0"/>
           </a:p>
@@ -2528,7 +2528,7 @@
           <a:p>
             <a:fld id="{C764DE79-268F-4C1A-8933-263129D2AF90}" type="datetimeFigureOut">
               <a:rPr lang="en-US" smtClean="0"/>
-              <a:t>6/16/2026</a:t>
+              <a:t>7/4/2026</a:t>
             </a:fld>
             <a:endParaRPr lang="en-US" dirty="0"/>
           </a:p>
@@ -2742,7 +2742,7 @@
           <a:p>
             <a:fld id="{C764DE79-268F-4C1A-8933-263129D2AF90}" type="datetimeFigureOut">
               <a:rPr lang="en-US" smtClean="0"/>
-              <a:t>6/16/2026</a:t>
+              <a:t>7/4/2026</a:t>
             </a:fld>
             <a:endParaRPr lang="en-US" dirty="0"/>
           </a:p>
@@ -3155,8 +3155,8 @@
           <a:chExt cx="0" cy="0"/>
         </a:xfrm>
       </p:grpSpPr>
-      <mc:AlternateContent xmlns:mc="http://schemas.openxmlformats.org/markup-compatibility/2006" xmlns:a14="http://schemas.microsoft.com/office/drawing/2010/main">
-        <mc:Choice Requires="a14">
+      <mc:AlternateContent xmlns:mc="http://schemas.openxmlformats.org/markup-compatibility/2006">
+        <mc:Choice xmlns:a14="http://schemas.microsoft.com/office/drawing/2010/main" Requires="a14">
           <p:graphicFrame>
             <p:nvGraphicFramePr>
               <p:cNvPr id="30" name="Tabelle 29">
@@ -3172,7 +3172,7 @@
               <p:nvPr>
                 <p:extLst>
                   <p:ext uri="{D42A27DB-BD31-4B8C-83A1-F6EECF244321}">
-                    <p14:modId xmlns:p14="http://schemas.microsoft.com/office/powerpoint/2010/main" val="3419591396"/>
+                    <p14:modId xmlns:p14="http://schemas.microsoft.com/office/powerpoint/2010/main" val="3084658979"/>
                   </p:ext>
                 </p:extLst>
               </p:nvPr>
@@ -4657,7 +4657,7 @@
                           <a:tailEnd type="none" w="med" len="med"/>
                         </a:lnB>
                         <a:solidFill>
-                          <a:srgbClr val="E2F1FE"/>
+                          <a:srgbClr val="BBDEFD"/>
                         </a:solidFill>
                       </a:tcPr>
                     </a:tc>
@@ -5782,7 +5782,7 @@
                           <a:tailEnd type="none" w="med" len="med"/>
                         </a:lnB>
                         <a:solidFill>
-                          <a:srgbClr val="E2F1FE"/>
+                          <a:srgbClr val="BBDEFD"/>
                         </a:solidFill>
                       </a:tcPr>
                     </a:tc>
@@ -5851,7 +5851,7 @@
             </a:graphic>
           </p:graphicFrame>
         </mc:Choice>
-        <mc:Fallback xmlns="">
+        <mc:Fallback>
           <p:graphicFrame>
             <p:nvGraphicFramePr>
               <p:cNvPr id="30" name="Tabelle 29">
@@ -5867,7 +5867,7 @@
               <p:nvPr>
                 <p:extLst>
                   <p:ext uri="{D42A27DB-BD31-4B8C-83A1-F6EECF244321}">
-                    <p14:modId xmlns:p14="http://schemas.microsoft.com/office/powerpoint/2010/main" val="3419591396"/>
+                    <p14:modId xmlns:p14="http://schemas.microsoft.com/office/powerpoint/2010/main" val="3084658979"/>
                   </p:ext>
                 </p:extLst>
               </p:nvPr>
@@ -7159,7 +7159,7 @@
                           <a:tailEnd type="none" w="med" len="med"/>
                         </a:lnB>
                         <a:solidFill>
-                          <a:srgbClr val="E2F1FE"/>
+                          <a:srgbClr val="BBDEFD"/>
                         </a:solidFill>
                       </a:tcPr>
                     </a:tc>
@@ -8127,7 +8127,7 @@
                           <a:tailEnd type="none" w="med" len="med"/>
                         </a:lnB>
                         <a:solidFill>
-                          <a:srgbClr val="E2F1FE"/>
+                          <a:srgbClr val="BBDEFD"/>
                         </a:solidFill>
                       </a:tcPr>
                     </a:tc>
@@ -8214,7 +8214,7 @@
               <p:nvPr>
                 <p:extLst>
                   <p:ext uri="{D42A27DB-BD31-4B8C-83A1-F6EECF244321}">
-                    <p14:modId xmlns:p14="http://schemas.microsoft.com/office/powerpoint/2010/main" val="4120303133"/>
+                    <p14:modId xmlns:p14="http://schemas.microsoft.com/office/powerpoint/2010/main" val="1700036"/>
                   </p:ext>
                 </p:extLst>
               </p:nvPr>
@@ -8640,7 +8640,7 @@
                           <a:tailEnd type="none" w="med" len="med"/>
                         </a:lnB>
                         <a:solidFill>
-                          <a:srgbClr val="F2FAF2"/>
+                          <a:srgbClr val="CCECCC"/>
                         </a:solidFill>
                       </a:tcPr>
                     </a:tc>
@@ -9298,7 +9298,7 @@
                           <a:tailEnd type="none" w="med" len="med"/>
                         </a:lnB>
                         <a:solidFill>
-                          <a:srgbClr val="F2FAF2"/>
+                          <a:srgbClr val="CCECCC"/>
                         </a:solidFill>
                       </a:tcPr>
                     </a:tc>
@@ -10489,7 +10489,7 @@
               <p:nvPr>
                 <p:extLst>
                   <p:ext uri="{D42A27DB-BD31-4B8C-83A1-F6EECF244321}">
-                    <p14:modId xmlns:p14="http://schemas.microsoft.com/office/powerpoint/2010/main" val="4120303133"/>
+                    <p14:modId xmlns:p14="http://schemas.microsoft.com/office/powerpoint/2010/main" val="1700036"/>
                   </p:ext>
                 </p:extLst>
               </p:nvPr>
@@ -10869,7 +10869,7 @@
                           <a:tailEnd type="none" w="med" len="med"/>
                         </a:lnB>
                         <a:solidFill>
-                          <a:srgbClr val="F2FAF2"/>
+                          <a:srgbClr val="CCECCC"/>
                         </a:solidFill>
                       </a:tcPr>
                     </a:tc>
@@ -11405,7 +11405,7 @@
                           <a:tailEnd type="none" w="med" len="med"/>
                         </a:lnB>
                         <a:solidFill>
-                          <a:srgbClr val="F2FAF2"/>
+                          <a:srgbClr val="CCECCC"/>
                         </a:solidFill>
                       </a:tcPr>
                     </a:tc>
@@ -12802,8 +12802,8 @@
           </a:fontRef>
         </p:style>
       </p:cxnSp>
-      <mc:AlternateContent xmlns:mc="http://schemas.openxmlformats.org/markup-compatibility/2006" xmlns:a14="http://schemas.microsoft.com/office/drawing/2010/main">
-        <mc:Choice Requires="a14">
+      <mc:AlternateContent xmlns:mc="http://schemas.openxmlformats.org/markup-compatibility/2006">
+        <mc:Choice xmlns:a14="http://schemas.microsoft.com/office/drawing/2010/main" Requires="a14">
           <p:graphicFrame>
             <p:nvGraphicFramePr>
               <p:cNvPr id="40" name="Tabelle 39">
@@ -12819,7 +12819,7 @@
               <p:nvPr>
                 <p:extLst>
                   <p:ext uri="{D42A27DB-BD31-4B8C-83A1-F6EECF244321}">
-                    <p14:modId xmlns:p14="http://schemas.microsoft.com/office/powerpoint/2010/main" val="3408173415"/>
+                    <p14:modId xmlns:p14="http://schemas.microsoft.com/office/powerpoint/2010/main" val="4293050895"/>
                   </p:ext>
                 </p:extLst>
               </p:nvPr>
@@ -14066,7 +14066,7 @@
                           <a:tailEnd type="none" w="med" len="med"/>
                         </a:lnB>
                         <a:solidFill>
-                          <a:srgbClr val="E2F1FE"/>
+                          <a:srgbClr val="BBDEFD"/>
                         </a:solidFill>
                       </a:tcPr>
                     </a:tc>
@@ -15040,7 +15040,7 @@
                           <a:tailEnd type="none" w="med" len="med"/>
                         </a:lnB>
                         <a:solidFill>
-                          <a:srgbClr val="E2F1FE"/>
+                          <a:srgbClr val="BBDEFD"/>
                         </a:solidFill>
                       </a:tcPr>
                     </a:tc>
@@ -15109,7 +15109,7 @@
             </a:graphic>
           </p:graphicFrame>
         </mc:Choice>
-        <mc:Fallback xmlns="">
+        <mc:Fallback>
           <p:graphicFrame>
             <p:nvGraphicFramePr>
               <p:cNvPr id="40" name="Tabelle 39">
@@ -15125,7 +15125,7 @@
               <p:nvPr>
                 <p:extLst>
                   <p:ext uri="{D42A27DB-BD31-4B8C-83A1-F6EECF244321}">
-                    <p14:modId xmlns:p14="http://schemas.microsoft.com/office/powerpoint/2010/main" val="3408173415"/>
+                    <p14:modId xmlns:p14="http://schemas.microsoft.com/office/powerpoint/2010/main" val="4293050895"/>
                   </p:ext>
                 </p:extLst>
               </p:nvPr>
@@ -16228,7 +16228,7 @@
                           <a:tailEnd type="none" w="med" len="med"/>
                         </a:lnB>
                         <a:solidFill>
-                          <a:srgbClr val="E2F1FE"/>
+                          <a:srgbClr val="BBDEFD"/>
                         </a:solidFill>
                       </a:tcPr>
                     </a:tc>
@@ -17102,7 +17102,7 @@
                           <a:tailEnd type="none" w="med" len="med"/>
                         </a:lnB>
                         <a:solidFill>
-                          <a:srgbClr val="E2F1FE"/>
+                          <a:srgbClr val="BBDEFD"/>
                         </a:solidFill>
                       </a:tcPr>
                     </a:tc>
@@ -17172,8 +17172,8 @@
           </p:graphicFrame>
         </mc:Fallback>
       </mc:AlternateContent>
-      <mc:AlternateContent xmlns:mc="http://schemas.openxmlformats.org/markup-compatibility/2006" xmlns:a14="http://schemas.microsoft.com/office/drawing/2010/main">
-        <mc:Choice Requires="a14">
+      <mc:AlternateContent xmlns:mc="http://schemas.openxmlformats.org/markup-compatibility/2006">
+        <mc:Choice xmlns:a14="http://schemas.microsoft.com/office/drawing/2010/main" Requires="a14">
           <p:graphicFrame>
             <p:nvGraphicFramePr>
               <p:cNvPr id="41" name="Tabelle 40">
@@ -17189,7 +17189,7 @@
               <p:nvPr>
                 <p:extLst>
                   <p:ext uri="{D42A27DB-BD31-4B8C-83A1-F6EECF244321}">
-                    <p14:modId xmlns:p14="http://schemas.microsoft.com/office/powerpoint/2010/main" val="4058403166"/>
+                    <p14:modId xmlns:p14="http://schemas.microsoft.com/office/powerpoint/2010/main" val="1692971970"/>
                   </p:ext>
                 </p:extLst>
               </p:nvPr>
@@ -17515,7 +17515,7 @@
                           <a:tailEnd type="none" w="med" len="med"/>
                         </a:lnB>
                         <a:solidFill>
-                          <a:srgbClr val="F2FAF2"/>
+                          <a:srgbClr val="CCECCC"/>
                         </a:solidFill>
                       </a:tcPr>
                     </a:tc>
@@ -18057,7 +18057,7 @@
                           <a:tailEnd type="none" w="med" len="med"/>
                         </a:lnB>
                         <a:solidFill>
-                          <a:srgbClr val="F2FAF2"/>
+                          <a:srgbClr val="CCECCC"/>
                         </a:solidFill>
                       </a:tcPr>
                     </a:tc>
@@ -19100,7 +19100,7 @@
             </a:graphic>
           </p:graphicFrame>
         </mc:Choice>
-        <mc:Fallback xmlns="">
+        <mc:Fallback>
           <p:graphicFrame>
             <p:nvGraphicFramePr>
               <p:cNvPr id="41" name="Tabelle 40">
@@ -19116,7 +19116,7 @@
               <p:nvPr>
                 <p:extLst>
                   <p:ext uri="{D42A27DB-BD31-4B8C-83A1-F6EECF244321}">
-                    <p14:modId xmlns:p14="http://schemas.microsoft.com/office/powerpoint/2010/main" val="4058403166"/>
+                    <p14:modId xmlns:p14="http://schemas.microsoft.com/office/powerpoint/2010/main" val="1692971970"/>
                   </p:ext>
                 </p:extLst>
               </p:nvPr>
@@ -19442,7 +19442,7 @@
                           <a:tailEnd type="none" w="med" len="med"/>
                         </a:lnB>
                         <a:solidFill>
-                          <a:srgbClr val="F2FAF2"/>
+                          <a:srgbClr val="CCECCC"/>
                         </a:solidFill>
                       </a:tcPr>
                     </a:tc>
@@ -19884,7 +19884,7 @@
                           <a:tailEnd type="none" w="med" len="med"/>
                         </a:lnB>
                         <a:solidFill>
-                          <a:srgbClr val="F2FAF2"/>
+                          <a:srgbClr val="CCECCC"/>
                         </a:solidFill>
                       </a:tcPr>
                     </a:tc>
@@ -21065,7 +21065,7 @@
             <a:avLst/>
           </a:prstGeom>
           <a:noFill/>
-          <a:ln w="31750">
+          <a:ln w="38100">
             <a:solidFill>
               <a:schemeClr val="accent5">
                 <a:lumMod val="75000"/>
@@ -21119,7 +21119,7 @@
             <a:avLst/>
           </a:prstGeom>
           <a:noFill/>
-          <a:ln w="31750">
+          <a:ln w="38100">
             <a:solidFill>
               <a:schemeClr val="accent6"/>
             </a:solidFill>
@@ -21171,7 +21171,7 @@
             <a:avLst/>
           </a:prstGeom>
           <a:noFill/>
-          <a:ln w="31750">
+          <a:ln w="38100">
             <a:solidFill>
               <a:schemeClr val="accent6"/>
             </a:solidFill>
@@ -21223,7 +21223,7 @@
             <a:avLst/>
           </a:prstGeom>
           <a:noFill/>
-          <a:ln w="31750">
+          <a:ln w="38100">
             <a:solidFill>
               <a:schemeClr val="accent5">
                 <a:lumMod val="75000"/>
@@ -21277,7 +21277,7 @@
             <a:avLst/>
           </a:prstGeom>
           <a:noFill/>
-          <a:ln w="31750">
+          <a:ln w="38100">
             <a:solidFill>
               <a:schemeClr val="accent5">
                 <a:lumMod val="75000"/>
@@ -21331,7 +21331,7 @@
             <a:avLst/>
           </a:prstGeom>
           <a:noFill/>
-          <a:ln w="31750">
+          <a:ln w="38100">
             <a:solidFill>
               <a:schemeClr val="accent6"/>
             </a:solidFill>
@@ -21383,7 +21383,7 @@
             <a:avLst/>
           </a:prstGeom>
           <a:noFill/>
-          <a:ln w="31750">
+          <a:ln w="38100">
             <a:solidFill>
               <a:schemeClr val="accent6"/>
             </a:solidFill>
@@ -21435,7 +21435,7 @@
             <a:avLst/>
           </a:prstGeom>
           <a:noFill/>
-          <a:ln w="31750">
+          <a:ln w="38100">
             <a:solidFill>
               <a:schemeClr val="accent5">
                 <a:lumMod val="75000"/>
